--- a/presentation/NephroTwin_AI_Pitch_Deck.pptx
+++ b/presentation/NephroTwin_AI_Pitch_Deck.pptx
@@ -7173,7 +7173,7 @@
       </p:sp>
       <p:pic>
         <p:nvPicPr>
-          <p:cNvPr id="22" name="Picture 21" descr="ravi_baseline_vs_heatwave.png"/>
+          <p:cNvPr id="22" name="Picture 21" descr="ravi_demo.png"/>
           <p:cNvPicPr>
             <a:picLocks noChangeAspect="1"/>
           </p:cNvPicPr>
@@ -7187,8 +7187,8 @@
         </p:blipFill>
         <p:spPr>
           <a:xfrm>
-            <a:off x="813816" y="1874519"/>
-            <a:ext cx="5162204" cy="3154680"/>
+            <a:off x="813816" y="1828800"/>
+            <a:ext cx="5464322" cy="3017520"/>
           </a:xfrm>
           <a:prstGeom prst="rect">
             <a:avLst/>
@@ -7197,7 +7197,7 @@
       </p:pic>
       <p:pic>
         <p:nvPicPr>
-          <p:cNvPr id="23" name="Picture 22" descr="real_roc_comparison.png"/>
+          <p:cNvPr id="23" name="Picture 22" descr="real_data.png"/>
           <p:cNvPicPr>
             <a:picLocks noChangeAspect="1"/>
           </p:cNvPicPr>
@@ -7211,8 +7211,8 @@
         </p:blipFill>
         <p:spPr>
           <a:xfrm>
-            <a:off x="6720840" y="1874519"/>
-            <a:ext cx="4301836" cy="3154680"/>
+            <a:off x="6355080" y="1828800"/>
+            <a:ext cx="5464322" cy="3017520"/>
           </a:xfrm>
           <a:prstGeom prst="rect">
             <a:avLst/>
@@ -7227,8 +7227,8 @@
         </p:nvSpPr>
         <p:spPr>
           <a:xfrm>
-            <a:off x="813816" y="5138928"/>
-            <a:ext cx="5669280" cy="822960"/>
+            <a:off x="813816" y="4983480"/>
+            <a:ext cx="5029200" cy="822960"/>
           </a:xfrm>
           <a:prstGeom prst="rect">
             <a:avLst/>
@@ -7248,7 +7248,7 @@
                 </a:solidFill>
                 <a:latin typeface="DM Sans"/>
               </a:rPr>
-              <a:t>Guided demo, step 5. The twin recomputes live: the same plan scores 4% (Green) at baseline and 55% with the synthetic heat-wave input. Shaded band = 10th to 90th percentile. Synthetic patient, demonstration input.</a:t>
+              <a:t>Ravi guided demo, step 5 (live app). The twin recomputes: the same plan scores 4% (Green) at baseline and 55% (Amber) with the synthetic heat-wave input. Synthetic patient, demonstration input.</a:t>
             </a:r>
           </a:p>
         </p:txBody>
@@ -7261,8 +7261,8 @@
         </p:nvSpPr>
         <p:spPr>
           <a:xfrm>
-            <a:off x="6720840" y="5138928"/>
-            <a:ext cx="4663440" cy="822960"/>
+            <a:off x="6355080" y="4983480"/>
+            <a:ext cx="5029200" cy="822960"/>
           </a:xfrm>
           <a:prstGeom prst="rect">
             <a:avLst/>
@@ -7282,7 +7282,7 @@
                 </a:solidFill>
                 <a:latin typeface="DM Sans"/>
               </a:rPr>
-              <a:t>Real-data validation (HEMOBP). The hybrid edges the standard model (0.871 vs 0.863) while adding physiology and what-if simulation; the twin alone trails. We report that openly.</a:t>
+              <a:t>Real-data validation page (live app). The hybrid edges the standard model (0.871 vs 0.863) while adding physiology and what-if simulation; the twin alone trails. We report that openly.</a:t>
             </a:r>
           </a:p>
         </p:txBody>

--- a/presentation/NephroTwin_AI_Pitch_Deck.pptx
+++ b/presentation/NephroTwin_AI_Pitch_Deck.pptx
@@ -612,7 +612,7 @@
           <a:p>
             <a:r>
               <a:rPr lang="en-US" dirty="0"/>
-              <a:t>Three phases. Phase 1: an IRB-approved prospective observational study with partner clinics, to validate real-world continuous monitoring with richer data. Phase 2: the regulatory pathway as Software as a Medical Device, a clinical decision support tool, via FDA 510(k) and CE mark; confirm the exact route with regulatory counsel. Phase 3: scale through strategic integration partnerships with dialysis machine manufacturers such as Fresenius and Baxter and EHR providers such as Epic and Cerner; these are target partners, with no agreements in place. Fill in the timeline placeholders.</a:t>
+              <a:t>Three phases. Phase 1: an IRB-approved prospective observational study with partner clinics, to validate real-world continuous monitoring with richer data. Phase 2: the regulatory pathway as Software as a Medical Device, a clinical decision support tool, via FDA 510(k) and CE mark; confirm the exact route with regulatory counsel. Phase 3: scale through strategic integration partnerships with dialysis machine manufacturers such as Fresenius and Baxter and EHR providers such as Epic and Cerner; these are target partners, with no agreements in place. Timeline: Phase 1 is 0 to 12 months, Phase 2 is 12 to 30 months, Phase 3 is 30 to 48 months.</a:t>
             </a:r>
             <a:endParaRPr lang="en-US" dirty="0"/>
           </a:p>
@@ -1474,7 +1474,7 @@
           <a:p>
             <a:r>
               <a:rPr lang="en-US" dirty="0"/>
-              <a:t>Switch to the live Streamlit app here if possible. The 13 views are grouped into unit, patient, story and trust. The Ravi guided demo walks seven steps: overview, dynamic data update, heat-wave toggle, twin update with a what-changed table, risk flag with explanations, what-if planner with non-directive wording, and a closing clinical-review step. The risk is computed by the twin, not hard-coded. The heat-wave rule is a documented synthetic rule, and the 2.8 kg gain is a demonstration input. Demo video: [Video Link]. Repo: [Repo URL].</a:t>
+              <a:t>Switch to the live Streamlit app here if possible. The 13 views are grouped into unit, patient, story and trust. The Ravi guided demo walks seven steps: overview, dynamic data update, heat-wave toggle, twin update with a what-changed table, risk flag with explanations, what-if planner with non-directive wording, and a closing clinical-review step. The risk is computed by the twin, not hard-coded. The heat-wave rule is a documented synthetic rule, and the 2.8 kg gain is a demonstration input. Demo video: https://youtu.be/qpSqBKuTWAU . Repo: https://github.com/Shada0/ZWEIKERN_Vel-Tech-Rangarajan-Dr-Sagunthala-RD-Institute . Live app: https://nephrotwin-ai.streamlit.app/ .</a:t>
             </a:r>
             <a:endParaRPr lang="en-US" dirty="0"/>
           </a:p>
@@ -2822,18 +2822,18 @@
         </p:nvSpPr>
         <p:spPr>
           <a:xfrm>
-            <a:off x="6117336" y="5074920"/>
-            <a:ext cx="5257800" cy="868680"/>
-          </a:xfrm>
-          <a:prstGeom prst="rect">
-            <a:avLst/>
-          </a:prstGeom>
-          <a:noFill/>
-          <a:ln/>
-        </p:spPr>
-        <p:txBody>
-          <a:bodyPr wrap="square" lIns="0" tIns="0" rIns="0" bIns="0" rtlCol="0" anchor="t">
-            <a:normAutofit/>
+            <a:off x="6117336" y="4937760"/>
+            <a:ext cx="5257800" cy="1005840"/>
+          </a:xfrm>
+          <a:prstGeom prst="rect">
+            <a:avLst/>
+          </a:prstGeom>
+          <a:noFill/>
+          <a:ln/>
+        </p:spPr>
+        <p:txBody>
+          <a:bodyPr wrap="square" lIns="0" tIns="0" rIns="0" bIns="0" rtlCol="0" anchor="t">
+            <a:noAutofit/>
           </a:bodyPr>
           <a:lstStyle/>
           <a:p>
@@ -2844,7 +2844,7 @@
               <a:buNone/>
             </a:pPr>
             <a:r>
-              <a:rPr lang="en-US" sz="1200" dirty="0">
+              <a:rPr lang="en-US" sz="950" dirty="0">
                 <a:solidFill>
                   <a:srgbClr val="A9C3D0"/>
                 </a:solidFill>
@@ -2852,7 +2852,7 @@
                 <a:ea typeface="DM Sans" pitchFamily="34" charset="-122"/>
                 <a:cs typeface="DM Sans" pitchFamily="34" charset="-120"/>
               </a:rPr>
-              <a:t>Repo: github.com/Shada0/NephroTwin-AI</a:t>
+              <a:t>Repo: github.com/Shada0/ZWEIKERN_Vel-Tech-Rangarajan-Dr-Sagunthala-RD-Institute</a:t>
             </a:r>
             <a:endParaRPr lang="en-US" sz="1200" dirty="0"/>
           </a:p>
@@ -2864,7 +2864,7 @@
               <a:buNone/>
             </a:pPr>
             <a:r>
-              <a:rPr lang="en-US" sz="1200" dirty="0">
+              <a:rPr lang="en-US" sz="950" dirty="0">
                 <a:solidFill>
                   <a:srgbClr val="A9C3D0"/>
                 </a:solidFill>
@@ -2872,7 +2872,7 @@
                 <a:ea typeface="DM Sans" pitchFamily="34" charset="-122"/>
                 <a:cs typeface="DM Sans" pitchFamily="34" charset="-120"/>
               </a:rPr>
-              <a:t>Demo video: [INSERT YOUTUBE UNLISTED VIDEO LINK HERE]</a:t>
+              <a:t>Demo video: https://youtu.be/qpSqBKuTWAU</a:t>
             </a:r>
             <a:endParaRPr lang="en-US" sz="1200" dirty="0"/>
           </a:p>
@@ -2884,7 +2884,7 @@
               <a:buNone/>
             </a:pPr>
             <a:r>
-              <a:rPr lang="en-US" sz="1200" dirty="0">
+              <a:rPr lang="en-US" sz="950" dirty="0">
                 <a:solidFill>
                   <a:srgbClr val="A9C3D0"/>
                 </a:solidFill>
@@ -2892,7 +2892,7 @@
                 <a:ea typeface="DM Sans" pitchFamily="34" charset="-122"/>
                 <a:cs typeface="DM Sans" pitchFamily="34" charset="-120"/>
               </a:rPr>
-              <a:t>Pitch deck: [INSERT GOOGLE DRIVE PITCH DECK LINK HERE]</a:t>
+              <a:t>Live app: https://nephrotwin-ai.streamlit.app/</a:t>
             </a:r>
             <a:endParaRPr lang="en-US" sz="1200" dirty="0"/>
           </a:p>
@@ -6689,8 +6689,8 @@
         </p:nvSpPr>
         <p:spPr>
           <a:xfrm>
-            <a:off x="6858000" y="3767328"/>
-            <a:ext cx="4480560" cy="274320"/>
+            <a:off x="6858000" y="3675887"/>
+            <a:ext cx="4526280" cy="411480"/>
           </a:xfrm>
           <a:prstGeom prst="rect">
             <a:avLst/>
@@ -6711,7 +6711,7 @@
               <a:buNone/>
             </a:pPr>
             <a:r>
-              <a:rPr lang="en-US" sz="1100" b="1" dirty="0">
+              <a:rPr lang="en-US" sz="900" b="1" dirty="0">
                 <a:solidFill>
                   <a:srgbClr val="0B1F2E"/>
                 </a:solidFill>
@@ -6722,7 +6722,7 @@
               <a:t>Repo (MIT):</a:t>
             </a:r>
             <a:r>
-              <a:rPr lang="en-US" sz="1100" dirty="0">
+              <a:rPr lang="en-US" sz="900" dirty="0">
                 <a:solidFill>
                   <a:srgbClr val="0B1F2E"/>
                 </a:solidFill>
@@ -6730,7 +6730,7 @@
                 <a:ea typeface="DM Sans" pitchFamily="34" charset="-122"/>
                 <a:cs typeface="DM Sans" pitchFamily="34" charset="-120"/>
               </a:rPr>
-              <a:t> github.com/Shada0/NephroTwin-AI</a:t>
+              <a:t> github.com/Shada0/ZWEIKERN_Vel-Tech-Rangarajan-Dr-Sagunthala-RD-Institute</a:t>
             </a:r>
             <a:endParaRPr lang="en-US" sz="1300" dirty="0"/>
           </a:p>
@@ -6744,8 +6744,8 @@
         </p:nvSpPr>
         <p:spPr>
           <a:xfrm>
-            <a:off x="6858000" y="4114800"/>
-            <a:ext cx="4480560" cy="274320"/>
+            <a:off x="6858000" y="4133087"/>
+            <a:ext cx="4526280" cy="256032"/>
           </a:xfrm>
           <a:prstGeom prst="rect">
             <a:avLst/>
@@ -6766,7 +6766,7 @@
               <a:buNone/>
             </a:pPr>
             <a:r>
-              <a:rPr lang="en-US" sz="1100" b="1" dirty="0">
+              <a:rPr lang="en-US" sz="1000" b="1" dirty="0">
                 <a:solidFill>
                   <a:srgbClr val="0B1F2E"/>
                 </a:solidFill>
@@ -6777,7 +6777,7 @@
               <a:t>Demo video:</a:t>
             </a:r>
             <a:r>
-              <a:rPr lang="en-US" sz="1100" dirty="0">
+              <a:rPr lang="en-US" sz="1000" dirty="0">
                 <a:solidFill>
                   <a:srgbClr val="0B1F2E"/>
                 </a:solidFill>
@@ -6785,7 +6785,7 @@
                 <a:ea typeface="DM Sans" pitchFamily="34" charset="-122"/>
                 <a:cs typeface="DM Sans" pitchFamily="34" charset="-120"/>
               </a:rPr>
-              <a:t> [INSERT YOUTUBE UNLISTED VIDEO LINK HERE]</a:t>
+              <a:t> https://youtu.be/qpSqBKuTWAU</a:t>
             </a:r>
             <a:endParaRPr lang="en-US" sz="1300" dirty="0"/>
           </a:p>
@@ -6799,8 +6799,8 @@
         </p:nvSpPr>
         <p:spPr>
           <a:xfrm>
-            <a:off x="6858000" y="4462272"/>
-            <a:ext cx="4480560" cy="274320"/>
+            <a:off x="6858000" y="4407408"/>
+            <a:ext cx="4526280" cy="256032"/>
           </a:xfrm>
           <a:prstGeom prst="rect">
             <a:avLst/>
@@ -6821,7 +6821,7 @@
               <a:buNone/>
             </a:pPr>
             <a:r>
-              <a:rPr lang="en-US" sz="1100" b="1" dirty="0">
+              <a:rPr lang="en-US" sz="1000" b="1" dirty="0">
                 <a:solidFill>
                   <a:srgbClr val="0B1F2E"/>
                 </a:solidFill>
@@ -6829,10 +6829,10 @@
                 <a:ea typeface="DM Sans" pitchFamily="34" charset="-122"/>
                 <a:cs typeface="DM Sans" pitchFamily="34" charset="-120"/>
               </a:rPr>
-              <a:t>Pitch deck:</a:t>
-            </a:r>
-            <a:r>
-              <a:rPr lang="en-US" sz="1100" dirty="0">
+              <a:t>Live app:</a:t>
+            </a:r>
+            <a:r>
+              <a:rPr lang="en-US" sz="1000" dirty="0">
                 <a:solidFill>
                   <a:srgbClr val="0B1F2E"/>
                 </a:solidFill>
@@ -6840,7 +6840,7 @@
                 <a:ea typeface="DM Sans" pitchFamily="34" charset="-122"/>
                 <a:cs typeface="DM Sans" pitchFamily="34" charset="-120"/>
               </a:rPr>
-              <a:t> [INSERT GOOGLE DRIVE PITCH DECK LINK HERE]</a:t>
+              <a:t> https://nephrotwin-ai.streamlit.app/</a:t>
             </a:r>
             <a:endParaRPr lang="en-US" sz="1300" dirty="0"/>
           </a:p>
